--- a/building-document-templates/registry/_builtin/proposal/template.pptx
+++ b/building-document-templates/registry/_builtin/proposal/template.pptx
@@ -12,6 +12,7 @@
     <p:sldId id="260" r:id="rId11"/>
     <p:sldId id="261" r:id="rId12"/>
     <p:sldId id="262" r:id="rId13"/>
+    <p:sldId id="263" r:id="rId14"/>
   </p:sldIdLst>
   <p:sldSz cx="12191695" cy="6858000" type="screen4x3"/>
   <p:notesSz cx="6858000" cy="9144000"/>
@@ -4181,6 +4182,157 @@
 </file>
 
 <file path=ppt/slides/slide7.xml><?xml version="1.0" encoding="utf-8"?>
+<p:sld xmlns:a="http://schemas.openxmlformats.org/drawingml/2006/main" xmlns:p="http://schemas.openxmlformats.org/presentationml/2006/main" xmlns:r="http://schemas.openxmlformats.org/officeDocument/2006/relationships">
+  <p:cSld>
+    <p:bg>
+      <p:bgPr>
+        <a:solidFill>
+          <a:srgbClr val="FFFFFF"/>
+        </a:solidFill>
+        <a:effectLst/>
+      </p:bgPr>
+    </p:bg>
+    <p:spTree>
+      <p:nvGrpSpPr>
+        <p:cNvPr id="1" name=""/>
+        <p:cNvGrpSpPr/>
+        <p:nvPr/>
+      </p:nvGrpSpPr>
+      <p:grpSpPr/>
+      <p:sp>
+        <p:nvSpPr>
+          <p:cNvPr id="2" name="Title 1"/>
+          <p:cNvSpPr>
+            <a:spLocks noGrp="1"/>
+          </p:cNvSpPr>
+          <p:nvPr>
+            <p:ph type="title"/>
+          </p:nvPr>
+        </p:nvSpPr>
+        <p:spPr>
+          <a:xfrm>
+            <a:off x="822960" y="1051560"/>
+            <a:ext cx="10545775" cy="1188720"/>
+          </a:xfrm>
+        </p:spPr>
+        <p:txBody>
+          <a:bodyPr wrap="square"/>
+          <a:lstStyle/>
+          <a:p>
+            <a:pPr algn="l">
+              <a:lnSpc>
+                <a:spcPct val="105000"/>
+              </a:lnSpc>
+            </a:pPr>
+            <a:r>
+              <a:rPr sz="3200" b="1">
+                <a:solidFill>
+                  <a:srgbClr val="0F172A"/>
+                </a:solidFill>
+                <a:latin typeface="Segoe UI"/>
+              </a:rPr>
+              <a:t>{{ topic_heading }}</a:t>
+            </a:r>
+          </a:p>
+        </p:txBody>
+      </p:sp>
+      <p:sp>
+        <p:nvSpPr>
+          <p:cNvPr id="3" name="Rectangle 2"/>
+          <p:cNvSpPr/>
+          <p:nvPr/>
+        </p:nvSpPr>
+        <p:spPr>
+          <a:xfrm>
+            <a:off x="822960" y="822960"/>
+            <a:ext cx="822960" cy="128016"/>
+          </a:xfrm>
+          <a:prstGeom prst="rect">
+            <a:avLst/>
+          </a:prstGeom>
+          <a:solidFill>
+            <a:srgbClr val="2563EB"/>
+          </a:solidFill>
+          <a:ln>
+            <a:noFill/>
+          </a:ln>
+          <a:effectLst/>
+        </p:spPr>
+        <p:style>
+          <a:lnRef idx="1">
+            <a:schemeClr val="accent1"/>
+          </a:lnRef>
+          <a:fillRef idx="3">
+            <a:schemeClr val="accent1"/>
+          </a:fillRef>
+          <a:effectRef idx="2">
+            <a:schemeClr val="accent1"/>
+          </a:effectRef>
+          <a:fontRef idx="minor">
+            <a:schemeClr val="lt1"/>
+          </a:fontRef>
+        </p:style>
+        <p:txBody>
+          <a:bodyPr rtlCol="0" anchor="ctr"/>
+          <a:lstStyle/>
+          <a:p>
+            <a:pPr algn="ctr"/>
+          </a:p>
+        </p:txBody>
+      </p:sp>
+      <p:sp>
+        <p:nvSpPr>
+          <p:cNvPr id="4" name="TextBox 3"/>
+          <p:cNvSpPr txBox="1"/>
+          <p:nvPr/>
+        </p:nvSpPr>
+        <p:spPr>
+          <a:xfrm>
+            <a:off x="822960" y="2377440"/>
+            <a:ext cx="10545775" cy="3840480"/>
+          </a:xfrm>
+          <a:prstGeom prst="rect">
+            <a:avLst/>
+          </a:prstGeom>
+          <a:noFill/>
+        </p:spPr>
+        <p:txBody>
+          <a:bodyPr wrap="square">
+            <a:spAutoFit/>
+          </a:bodyPr>
+          <a:lstStyle/>
+          <a:p>
+            <a:pPr>
+              <a:lnSpc>
+                <a:spcPct val="120000"/>
+              </a:lnSpc>
+              <a:spcAft>
+                <a:spcPts val="1000"/>
+              </a:spcAft>
+              <a:buFont typeface="Arial" pitchFamily="34" charset="0"/>
+              <a:buChar char="•"/>
+            </a:pPr>
+            <a:r>
+              <a:rPr sz="2000">
+                <a:solidFill>
+                  <a:srgbClr val="0F172A"/>
+                </a:solidFill>
+                <a:latin typeface="Segoe UI"/>
+              </a:rPr>
+              <a:t>{{ topic_points }}</a:t>
+            </a:r>
+          </a:p>
+        </p:txBody>
+      </p:sp>
+    </p:spTree>
+  </p:cSld>
+  <p:clrMapOvr>
+    <a:masterClrMapping/>
+  </p:clrMapOvr>
+</p:sld>
+</file>
+
+<file path=ppt/slides/slide8.xml><?xml version="1.0" encoding="utf-8"?>
 <p:sld xmlns:a="http://schemas.openxmlformats.org/drawingml/2006/main" xmlns:p="http://schemas.openxmlformats.org/presentationml/2006/main" xmlns:r="http://schemas.openxmlformats.org/officeDocument/2006/relationships">
   <p:cSld>
     <p:bg>

--- a/building-document-templates/registry/_builtin/proposal/template.pptx
+++ b/building-document-templates/registry/_builtin/proposal/template.pptx
@@ -3469,7 +3469,7 @@
           </a:bodyPr>
           <a:lstStyle/>
           <a:p>
-            <a:pPr>
+            <a:pPr marL="228600" indent="-228600">
               <a:lnSpc>
                 <a:spcPct val="120000"/>
               </a:lnSpc>
@@ -3659,7 +3659,7 @@
           </a:bodyPr>
           <a:lstStyle/>
           <a:p>
-            <a:pPr>
+            <a:pPr marL="228600" indent="-228600">
               <a:lnSpc>
                 <a:spcPct val="120000"/>
               </a:lnSpc>
@@ -3810,7 +3810,7 @@
           </a:bodyPr>
           <a:lstStyle/>
           <a:p>
-            <a:pPr>
+            <a:pPr marL="228600" indent="-228600">
               <a:lnSpc>
                 <a:spcPct val="120000"/>
               </a:lnSpc>
@@ -3961,7 +3961,7 @@
           </a:bodyPr>
           <a:lstStyle/>
           <a:p>
-            <a:pPr>
+            <a:pPr marL="228600" indent="-228600">
               <a:lnSpc>
                 <a:spcPct val="120000"/>
               </a:lnSpc>
@@ -4151,7 +4151,7 @@
           </a:bodyPr>
           <a:lstStyle/>
           <a:p>
-            <a:pPr>
+            <a:pPr marL="228600" indent="-228600">
               <a:lnSpc>
                 <a:spcPct val="120000"/>
               </a:lnSpc>
@@ -4302,7 +4302,7 @@
           </a:bodyPr>
           <a:lstStyle/>
           <a:p>
-            <a:pPr>
+            <a:pPr marL="228600" indent="-228600">
               <a:lnSpc>
                 <a:spcPct val="120000"/>
               </a:lnSpc>
@@ -4492,7 +4492,7 @@
           </a:bodyPr>
           <a:lstStyle/>
           <a:p>
-            <a:pPr>
+            <a:pPr marL="228600" indent="-228600">
               <a:lnSpc>
                 <a:spcPct val="120000"/>
               </a:lnSpc>

--- a/building-document-templates/registry/_builtin/proposal/template.pptx
+++ b/building-document-templates/registry/_builtin/proposal/template.pptx
@@ -13,6 +13,12 @@
     <p:sldId id="261" r:id="rId12"/>
     <p:sldId id="262" r:id="rId13"/>
     <p:sldId id="263" r:id="rId14"/>
+    <p:sldId id="264" r:id="rId15"/>
+    <p:sldId id="265" r:id="rId16"/>
+    <p:sldId id="266" r:id="rId17"/>
+    <p:sldId id="267" r:id="rId18"/>
+    <p:sldId id="268" r:id="rId19"/>
+    <p:sldId id="269" r:id="rId20"/>
   </p:sldIdLst>
   <p:sldSz cx="12191695" cy="6858000" type="screen4x3"/>
   <p:notesSz cx="6858000" cy="9144000"/>
@@ -3135,7 +3141,7 @@
                 </a:solidFill>
                 <a:latin typeface="Segoe UI"/>
               </a:rPr>
-              <a:t>{{ proposal_title }}</a:t>
+              <a:t>{{ deck_title }}</a:t>
             </a:r>
           </a:p>
         </p:txBody>
@@ -3218,7 +3224,7 @@
                 </a:solidFill>
                 <a:latin typeface="Segoe UI"/>
               </a:rPr>
-              <a:t>PROPOSAL · {{ proposal_date }}</a:t>
+              <a:t>{{ deck_eyebrow }}</a:t>
             </a:r>
           </a:p>
         </p:txBody>
@@ -3257,7 +3263,7 @@
                 </a:solidFill>
                 <a:latin typeface="Segoe UI"/>
               </a:rPr>
-              <a:t>Prepared for {{ client_name }}</a:t>
+              <a:t>{{ deck_subtitle }}</a:t>
             </a:r>
           </a:p>
         </p:txBody>
@@ -3297,6 +3303,912 @@
                 <a:latin typeface="Segoe UI"/>
               </a:rPr>
               <a:t>{{ author_line }}</a:t>
+            </a:r>
+          </a:p>
+        </p:txBody>
+      </p:sp>
+    </p:spTree>
+  </p:cSld>
+  <p:clrMapOvr>
+    <a:masterClrMapping/>
+  </p:clrMapOvr>
+</p:sld>
+</file>
+
+<file path=ppt/slides/slide10.xml><?xml version="1.0" encoding="utf-8"?>
+<p:sld xmlns:a="http://schemas.openxmlformats.org/drawingml/2006/main" xmlns:p="http://schemas.openxmlformats.org/presentationml/2006/main" xmlns:r="http://schemas.openxmlformats.org/officeDocument/2006/relationships">
+  <p:cSld>
+    <p:bg>
+      <p:bgPr>
+        <a:solidFill>
+          <a:srgbClr val="FFFFFF"/>
+        </a:solidFill>
+        <a:effectLst/>
+      </p:bgPr>
+    </p:bg>
+    <p:spTree>
+      <p:nvGrpSpPr>
+        <p:cNvPr id="1" name=""/>
+        <p:cNvGrpSpPr/>
+        <p:nvPr/>
+      </p:nvGrpSpPr>
+      <p:grpSpPr/>
+      <p:sp>
+        <p:nvSpPr>
+          <p:cNvPr id="2" name="Title 1"/>
+          <p:cNvSpPr>
+            <a:spLocks noGrp="1"/>
+          </p:cNvSpPr>
+          <p:nvPr>
+            <p:ph type="title"/>
+          </p:nvPr>
+        </p:nvSpPr>
+        <p:spPr>
+          <a:xfrm>
+            <a:off x="822960" y="1051560"/>
+            <a:ext cx="10545775" cy="1188720"/>
+          </a:xfrm>
+        </p:spPr>
+        <p:txBody>
+          <a:bodyPr wrap="square"/>
+          <a:lstStyle/>
+          <a:p>
+            <a:pPr algn="l">
+              <a:lnSpc>
+                <a:spcPct val="105000"/>
+              </a:lnSpc>
+            </a:pPr>
+            <a:r>
+              <a:rPr sz="3200" b="1">
+                <a:solidFill>
+                  <a:srgbClr val="0F172A"/>
+                </a:solidFill>
+                <a:latin typeface="Segoe UI"/>
+              </a:rPr>
+              <a:t>{{ heading }}</a:t>
+            </a:r>
+          </a:p>
+        </p:txBody>
+      </p:sp>
+      <p:sp>
+        <p:nvSpPr>
+          <p:cNvPr id="3" name="Rectangle 2"/>
+          <p:cNvSpPr/>
+          <p:nvPr/>
+        </p:nvSpPr>
+        <p:spPr>
+          <a:xfrm>
+            <a:off x="822960" y="822960"/>
+            <a:ext cx="822960" cy="128016"/>
+          </a:xfrm>
+          <a:prstGeom prst="rect">
+            <a:avLst/>
+          </a:prstGeom>
+          <a:solidFill>
+            <a:srgbClr val="2563EB"/>
+          </a:solidFill>
+          <a:ln>
+            <a:noFill/>
+          </a:ln>
+          <a:effectLst/>
+        </p:spPr>
+        <p:style>
+          <a:lnRef idx="1">
+            <a:schemeClr val="accent1"/>
+          </a:lnRef>
+          <a:fillRef idx="3">
+            <a:schemeClr val="accent1"/>
+          </a:fillRef>
+          <a:effectRef idx="2">
+            <a:schemeClr val="accent1"/>
+          </a:effectRef>
+          <a:fontRef idx="minor">
+            <a:schemeClr val="lt1"/>
+          </a:fontRef>
+        </p:style>
+        <p:txBody>
+          <a:bodyPr rtlCol="0" anchor="ctr"/>
+          <a:lstStyle/>
+          <a:p>
+            <a:pPr algn="ctr"/>
+          </a:p>
+        </p:txBody>
+      </p:sp>
+      <p:sp>
+        <p:nvSpPr>
+          <p:cNvPr id="4" name="TABLE_SLOT"/>
+          <p:cNvSpPr/>
+          <p:nvPr/>
+        </p:nvSpPr>
+        <p:spPr>
+          <a:xfrm>
+            <a:off x="822960" y="2286000"/>
+            <a:ext cx="10545775" cy="3566160"/>
+          </a:xfrm>
+          <a:prstGeom prst="rect">
+            <a:avLst/>
+          </a:prstGeom>
+          <a:solidFill>
+            <a:srgbClr val="F1F5F9"/>
+          </a:solidFill>
+          <a:ln>
+            <a:solidFill>
+              <a:srgbClr val="E2E8F0"/>
+            </a:solidFill>
+          </a:ln>
+          <a:effectLst/>
+        </p:spPr>
+        <p:style>
+          <a:lnRef idx="1">
+            <a:schemeClr val="accent1"/>
+          </a:lnRef>
+          <a:fillRef idx="3">
+            <a:schemeClr val="accent1"/>
+          </a:fillRef>
+          <a:effectRef idx="2">
+            <a:schemeClr val="accent1"/>
+          </a:effectRef>
+          <a:fontRef idx="minor">
+            <a:schemeClr val="lt1"/>
+          </a:fontRef>
+        </p:style>
+        <p:txBody>
+          <a:bodyPr rtlCol="0" anchor="ctr"/>
+          <a:lstStyle/>
+          <a:p>
+            <a:pPr algn="ctr"/>
+            <a:r>
+              <a:rPr sz="1200">
+                <a:solidFill>
+                  <a:srgbClr val="54617A"/>
+                </a:solidFill>
+                <a:latin typeface="Segoe UI"/>
+              </a:rPr>
+              <a:t>Native table renders here (fill.py builds it from the entry's columns/rows)</a:t>
+            </a:r>
+          </a:p>
+        </p:txBody>
+      </p:sp>
+      <p:sp>
+        <p:nvSpPr>
+          <p:cNvPr id="5" name="TextBox 4"/>
+          <p:cNvSpPr txBox="1"/>
+          <p:nvPr/>
+        </p:nvSpPr>
+        <p:spPr>
+          <a:xfrm>
+            <a:off x="822960" y="5989320"/>
+            <a:ext cx="10545775" cy="411480"/>
+          </a:xfrm>
+          <a:prstGeom prst="rect">
+            <a:avLst/>
+          </a:prstGeom>
+          <a:noFill/>
+        </p:spPr>
+        <p:txBody>
+          <a:bodyPr wrap="square" anchor="t">
+            <a:spAutoFit/>
+          </a:bodyPr>
+          <a:lstStyle/>
+          <a:p>
+            <a:pPr algn="l">
+              <a:lnSpc>
+                <a:spcPct val="100000"/>
+              </a:lnSpc>
+            </a:pPr>
+            <a:r>
+              <a:rPr sz="1200" b="0">
+                <a:solidFill>
+                  <a:srgbClr val="54617A"/>
+                </a:solidFill>
+                <a:latin typeface="Segoe UI"/>
+              </a:rPr>
+              <a:t>{{ note }}</a:t>
+            </a:r>
+          </a:p>
+        </p:txBody>
+      </p:sp>
+    </p:spTree>
+  </p:cSld>
+  <p:clrMapOvr>
+    <a:masterClrMapping/>
+  </p:clrMapOvr>
+</p:sld>
+</file>
+
+<file path=ppt/slides/slide11.xml><?xml version="1.0" encoding="utf-8"?>
+<p:sld xmlns:a="http://schemas.openxmlformats.org/drawingml/2006/main" xmlns:p="http://schemas.openxmlformats.org/presentationml/2006/main" xmlns:r="http://schemas.openxmlformats.org/officeDocument/2006/relationships">
+  <p:cSld>
+    <p:bg>
+      <p:bgPr>
+        <a:solidFill>
+          <a:srgbClr val="FFFFFF"/>
+        </a:solidFill>
+        <a:effectLst/>
+      </p:bgPr>
+    </p:bg>
+    <p:spTree>
+      <p:nvGrpSpPr>
+        <p:cNvPr id="1" name=""/>
+        <p:cNvGrpSpPr/>
+        <p:nvPr/>
+      </p:nvGrpSpPr>
+      <p:grpSpPr/>
+      <p:sp>
+        <p:nvSpPr>
+          <p:cNvPr id="2" name="Title 1"/>
+          <p:cNvSpPr>
+            <a:spLocks noGrp="1"/>
+          </p:cNvSpPr>
+          <p:nvPr>
+            <p:ph type="title"/>
+          </p:nvPr>
+        </p:nvSpPr>
+        <p:spPr>
+          <a:xfrm>
+            <a:off x="822960" y="1051560"/>
+            <a:ext cx="10545775" cy="1188720"/>
+          </a:xfrm>
+        </p:spPr>
+        <p:txBody>
+          <a:bodyPr wrap="square"/>
+          <a:lstStyle/>
+          <a:p>
+            <a:pPr algn="l">
+              <a:lnSpc>
+                <a:spcPct val="105000"/>
+              </a:lnSpc>
+            </a:pPr>
+            <a:r>
+              <a:rPr sz="3200" b="1">
+                <a:solidFill>
+                  <a:srgbClr val="0F172A"/>
+                </a:solidFill>
+                <a:latin typeface="Segoe UI"/>
+              </a:rPr>
+              <a:t>{{ heading }}</a:t>
+            </a:r>
+          </a:p>
+        </p:txBody>
+      </p:sp>
+      <p:sp>
+        <p:nvSpPr>
+          <p:cNvPr id="3" name="Rectangle 2"/>
+          <p:cNvSpPr/>
+          <p:nvPr/>
+        </p:nvSpPr>
+        <p:spPr>
+          <a:xfrm>
+            <a:off x="822960" y="822960"/>
+            <a:ext cx="822960" cy="128016"/>
+          </a:xfrm>
+          <a:prstGeom prst="rect">
+            <a:avLst/>
+          </a:prstGeom>
+          <a:solidFill>
+            <a:srgbClr val="2563EB"/>
+          </a:solidFill>
+          <a:ln>
+            <a:noFill/>
+          </a:ln>
+          <a:effectLst/>
+        </p:spPr>
+        <p:style>
+          <a:lnRef idx="1">
+            <a:schemeClr val="accent1"/>
+          </a:lnRef>
+          <a:fillRef idx="3">
+            <a:schemeClr val="accent1"/>
+          </a:fillRef>
+          <a:effectRef idx="2">
+            <a:schemeClr val="accent1"/>
+          </a:effectRef>
+          <a:fontRef idx="minor">
+            <a:schemeClr val="lt1"/>
+          </a:fontRef>
+        </p:style>
+        <p:txBody>
+          <a:bodyPr rtlCol="0" anchor="ctr"/>
+          <a:lstStyle/>
+          <a:p>
+            <a:pPr algn="ctr"/>
+          </a:p>
+        </p:txBody>
+      </p:sp>
+      <p:pic>
+        <p:nvPicPr>
+          <p:cNvPr id="4" name="Picture 3" descr="image.png"/>
+          <p:cNvPicPr>
+            <a:picLocks noChangeAspect="1"/>
+          </p:cNvPicPr>
+          <p:nvPr/>
+        </p:nvPicPr>
+        <p:blipFill>
+          <a:blip r:embed="rId2"/>
+          <a:stretch>
+            <a:fillRect/>
+          </a:stretch>
+        </p:blipFill>
+        <p:spPr>
+          <a:xfrm>
+            <a:off x="822960" y="2331720"/>
+            <a:ext cx="10545775" cy="3383280"/>
+          </a:xfrm>
+          <a:prstGeom prst="rect">
+            <a:avLst/>
+          </a:prstGeom>
+        </p:spPr>
+      </p:pic>
+      <p:sp>
+        <p:nvSpPr>
+          <p:cNvPr id="5" name="TextBox 4"/>
+          <p:cNvSpPr txBox="1"/>
+          <p:nvPr/>
+        </p:nvSpPr>
+        <p:spPr>
+          <a:xfrm>
+            <a:off x="822960" y="5852160"/>
+            <a:ext cx="10545775" cy="457200"/>
+          </a:xfrm>
+          <a:prstGeom prst="rect">
+            <a:avLst/>
+          </a:prstGeom>
+          <a:noFill/>
+        </p:spPr>
+        <p:txBody>
+          <a:bodyPr wrap="square" anchor="t">
+            <a:spAutoFit/>
+          </a:bodyPr>
+          <a:lstStyle/>
+          <a:p>
+            <a:pPr algn="l">
+              <a:lnSpc>
+                <a:spcPct val="100000"/>
+              </a:lnSpc>
+            </a:pPr>
+            <a:r>
+              <a:rPr sz="1400" b="0">
+                <a:solidFill>
+                  <a:srgbClr val="54617A"/>
+                </a:solidFill>
+                <a:latin typeface="Segoe UI"/>
+              </a:rPr>
+              <a:t>{{ caption }}</a:t>
+            </a:r>
+          </a:p>
+        </p:txBody>
+      </p:sp>
+    </p:spTree>
+  </p:cSld>
+  <p:clrMapOvr>
+    <a:masterClrMapping/>
+  </p:clrMapOvr>
+</p:sld>
+</file>
+
+<file path=ppt/slides/slide12.xml><?xml version="1.0" encoding="utf-8"?>
+<p:sld xmlns:a="http://schemas.openxmlformats.org/drawingml/2006/main" xmlns:p="http://schemas.openxmlformats.org/presentationml/2006/main" xmlns:r="http://schemas.openxmlformats.org/officeDocument/2006/relationships">
+  <p:cSld>
+    <p:bg>
+      <p:bgPr>
+        <a:solidFill>
+          <a:srgbClr val="0F172A"/>
+        </a:solidFill>
+        <a:effectLst/>
+      </p:bgPr>
+    </p:bg>
+    <p:spTree>
+      <p:nvGrpSpPr>
+        <p:cNvPr id="1" name=""/>
+        <p:cNvGrpSpPr/>
+        <p:nvPr/>
+      </p:nvGrpSpPr>
+      <p:grpSpPr/>
+      <p:sp>
+        <p:nvSpPr>
+          <p:cNvPr id="2" name="Title 1"/>
+          <p:cNvSpPr>
+            <a:spLocks noGrp="1"/>
+          </p:cNvSpPr>
+          <p:nvPr>
+            <p:ph type="title"/>
+          </p:nvPr>
+        </p:nvSpPr>
+        <p:spPr/>
+        <p:txBody>
+          <a:bodyPr/>
+          <a:lstStyle/>
+          <a:p/>
+        </p:txBody>
+      </p:sp>
+      <p:sp>
+        <p:nvSpPr>
+          <p:cNvPr id="3" name="Rectangle 2"/>
+          <p:cNvSpPr/>
+          <p:nvPr/>
+        </p:nvSpPr>
+        <p:spPr>
+          <a:xfrm>
+            <a:off x="0" y="0"/>
+            <a:ext cx="256032" cy="6858000"/>
+          </a:xfrm>
+          <a:prstGeom prst="rect">
+            <a:avLst/>
+          </a:prstGeom>
+          <a:solidFill>
+            <a:srgbClr val="2563EB"/>
+          </a:solidFill>
+          <a:ln>
+            <a:noFill/>
+          </a:ln>
+          <a:effectLst/>
+        </p:spPr>
+        <p:style>
+          <a:lnRef idx="1">
+            <a:schemeClr val="accent1"/>
+          </a:lnRef>
+          <a:fillRef idx="3">
+            <a:schemeClr val="accent1"/>
+          </a:fillRef>
+          <a:effectRef idx="2">
+            <a:schemeClr val="accent1"/>
+          </a:effectRef>
+          <a:fontRef idx="minor">
+            <a:schemeClr val="lt1"/>
+          </a:fontRef>
+        </p:style>
+        <p:txBody>
+          <a:bodyPr rtlCol="0" anchor="ctr"/>
+          <a:lstStyle/>
+          <a:p>
+            <a:pPr algn="ctr"/>
+          </a:p>
+        </p:txBody>
+      </p:sp>
+      <p:sp>
+        <p:nvSpPr>
+          <p:cNvPr id="4" name="TextBox 3"/>
+          <p:cNvSpPr txBox="1"/>
+          <p:nvPr/>
+        </p:nvSpPr>
+        <p:spPr>
+          <a:xfrm>
+            <a:off x="822960" y="1463040"/>
+            <a:ext cx="1097280" cy="1280160"/>
+          </a:xfrm>
+          <a:prstGeom prst="rect">
+            <a:avLst/>
+          </a:prstGeom>
+          <a:noFill/>
+        </p:spPr>
+        <p:txBody>
+          <a:bodyPr wrap="square" anchor="t">
+            <a:spAutoFit/>
+          </a:bodyPr>
+          <a:lstStyle/>
+          <a:p>
+            <a:pPr algn="l">
+              <a:lnSpc>
+                <a:spcPct val="100000"/>
+              </a:lnSpc>
+            </a:pPr>
+            <a:r>
+              <a:rPr sz="11000" b="1">
+                <a:solidFill>
+                  <a:srgbClr val="0891B2"/>
+                </a:solidFill>
+                <a:latin typeface="Segoe UI"/>
+              </a:rPr>
+              <a:t>“</a:t>
+            </a:r>
+          </a:p>
+        </p:txBody>
+      </p:sp>
+      <p:sp>
+        <p:nvSpPr>
+          <p:cNvPr id="5" name="TextBox 4"/>
+          <p:cNvSpPr txBox="1"/>
+          <p:nvPr/>
+        </p:nvSpPr>
+        <p:spPr>
+          <a:xfrm>
+            <a:off x="914400" y="2468880"/>
+            <a:ext cx="10180015" cy="2194560"/>
+          </a:xfrm>
+          <a:prstGeom prst="rect">
+            <a:avLst/>
+          </a:prstGeom>
+          <a:noFill/>
+        </p:spPr>
+        <p:txBody>
+          <a:bodyPr wrap="square" anchor="t">
+            <a:spAutoFit/>
+          </a:bodyPr>
+          <a:lstStyle/>
+          <a:p>
+            <a:pPr algn="l">
+              <a:lnSpc>
+                <a:spcPct val="125000"/>
+              </a:lnSpc>
+            </a:pPr>
+            <a:r>
+              <a:rPr sz="2800" b="0">
+                <a:solidFill>
+                  <a:srgbClr val="FFFFFF"/>
+                </a:solidFill>
+                <a:latin typeface="Segoe UI"/>
+              </a:rPr>
+              <a:t>{{ quote }}</a:t>
+            </a:r>
+          </a:p>
+        </p:txBody>
+      </p:sp>
+      <p:sp>
+        <p:nvSpPr>
+          <p:cNvPr id="6" name="TextBox 5"/>
+          <p:cNvSpPr txBox="1"/>
+          <p:nvPr/>
+        </p:nvSpPr>
+        <p:spPr>
+          <a:xfrm>
+            <a:off x="914400" y="5120640"/>
+            <a:ext cx="10545775" cy="457200"/>
+          </a:xfrm>
+          <a:prstGeom prst="rect">
+            <a:avLst/>
+          </a:prstGeom>
+          <a:noFill/>
+        </p:spPr>
+        <p:txBody>
+          <a:bodyPr wrap="square" anchor="t">
+            <a:spAutoFit/>
+          </a:bodyPr>
+          <a:lstStyle/>
+          <a:p>
+            <a:pPr algn="l">
+              <a:lnSpc>
+                <a:spcPct val="100000"/>
+              </a:lnSpc>
+            </a:pPr>
+            <a:r>
+              <a:rPr sz="1500" b="0">
+                <a:solidFill>
+                  <a:srgbClr val="F5F7FA"/>
+                </a:solidFill>
+                <a:latin typeface="Segoe UI"/>
+              </a:rPr>
+              <a:t>{{ attribution }}</a:t>
+            </a:r>
+          </a:p>
+        </p:txBody>
+      </p:sp>
+    </p:spTree>
+  </p:cSld>
+  <p:clrMapOvr>
+    <a:masterClrMapping/>
+  </p:clrMapOvr>
+</p:sld>
+</file>
+
+<file path=ppt/slides/slide13.xml><?xml version="1.0" encoding="utf-8"?>
+<p:sld xmlns:a="http://schemas.openxmlformats.org/drawingml/2006/main" xmlns:p="http://schemas.openxmlformats.org/presentationml/2006/main" xmlns:r="http://schemas.openxmlformats.org/officeDocument/2006/relationships">
+  <p:cSld>
+    <p:bg>
+      <p:bgPr>
+        <a:solidFill>
+          <a:srgbClr val="0F172A"/>
+        </a:solidFill>
+        <a:effectLst/>
+      </p:bgPr>
+    </p:bg>
+    <p:spTree>
+      <p:nvGrpSpPr>
+        <p:cNvPr id="1" name=""/>
+        <p:cNvGrpSpPr/>
+        <p:nvPr/>
+      </p:nvGrpSpPr>
+      <p:grpSpPr/>
+      <p:sp>
+        <p:nvSpPr>
+          <p:cNvPr id="2" name="Title 1"/>
+          <p:cNvSpPr>
+            <a:spLocks noGrp="1"/>
+          </p:cNvSpPr>
+          <p:nvPr>
+            <p:ph type="title"/>
+          </p:nvPr>
+        </p:nvSpPr>
+        <p:spPr>
+          <a:xfrm>
+            <a:off x="822960" y="3749039"/>
+            <a:ext cx="10545775" cy="1097280"/>
+          </a:xfrm>
+        </p:spPr>
+        <p:txBody>
+          <a:bodyPr wrap="square"/>
+          <a:lstStyle/>
+          <a:p>
+            <a:pPr algn="l">
+              <a:lnSpc>
+                <a:spcPct val="105000"/>
+              </a:lnSpc>
+            </a:pPr>
+            <a:r>
+              <a:rPr sz="3800" b="1">
+                <a:solidFill>
+                  <a:srgbClr val="FFFFFF"/>
+                </a:solidFill>
+                <a:latin typeface="Segoe UI"/>
+              </a:rPr>
+              <a:t>{{ heading }}</a:t>
+            </a:r>
+          </a:p>
+        </p:txBody>
+      </p:sp>
+      <p:sp>
+        <p:nvSpPr>
+          <p:cNvPr id="3" name="TextBox 2"/>
+          <p:cNvSpPr txBox="1"/>
+          <p:nvPr/>
+        </p:nvSpPr>
+        <p:spPr>
+          <a:xfrm>
+            <a:off x="822960" y="1828800"/>
+            <a:ext cx="2743200" cy="1645920"/>
+          </a:xfrm>
+          <a:prstGeom prst="rect">
+            <a:avLst/>
+          </a:prstGeom>
+          <a:noFill/>
+        </p:spPr>
+        <p:txBody>
+          <a:bodyPr wrap="square" anchor="t">
+            <a:spAutoFit/>
+          </a:bodyPr>
+          <a:lstStyle/>
+          <a:p>
+            <a:pPr algn="l">
+              <a:lnSpc>
+                <a:spcPct val="100000"/>
+              </a:lnSpc>
+            </a:pPr>
+            <a:r>
+              <a:rPr sz="8800" b="1">
+                <a:solidFill>
+                  <a:srgbClr val="0891B2"/>
+                </a:solidFill>
+                <a:latin typeface="Segoe UI"/>
+              </a:rPr>
+              <a:t>{{ marker }}</a:t>
+            </a:r>
+          </a:p>
+        </p:txBody>
+      </p:sp>
+      <p:sp>
+        <p:nvSpPr>
+          <p:cNvPr id="4" name="TextBox 3"/>
+          <p:cNvSpPr txBox="1"/>
+          <p:nvPr/>
+        </p:nvSpPr>
+        <p:spPr>
+          <a:xfrm>
+            <a:off x="822960" y="4937760"/>
+            <a:ext cx="10545775" cy="822960"/>
+          </a:xfrm>
+          <a:prstGeom prst="rect">
+            <a:avLst/>
+          </a:prstGeom>
+          <a:noFill/>
+        </p:spPr>
+        <p:txBody>
+          <a:bodyPr wrap="square" anchor="t">
+            <a:spAutoFit/>
+          </a:bodyPr>
+          <a:lstStyle/>
+          <a:p>
+            <a:pPr algn="l">
+              <a:lnSpc>
+                <a:spcPct val="100000"/>
+              </a:lnSpc>
+            </a:pPr>
+            <a:r>
+              <a:rPr sz="1800" b="0">
+                <a:solidFill>
+                  <a:srgbClr val="F5F7FA"/>
+                </a:solidFill>
+                <a:latin typeface="Segoe UI"/>
+              </a:rPr>
+              <a:t>{{ note }}</a:t>
+            </a:r>
+          </a:p>
+        </p:txBody>
+      </p:sp>
+    </p:spTree>
+  </p:cSld>
+  <p:clrMapOvr>
+    <a:masterClrMapping/>
+  </p:clrMapOvr>
+</p:sld>
+</file>
+
+<file path=ppt/slides/slide14.xml><?xml version="1.0" encoding="utf-8"?>
+<p:sld xmlns:a="http://schemas.openxmlformats.org/drawingml/2006/main" xmlns:p="http://schemas.openxmlformats.org/presentationml/2006/main" xmlns:r="http://schemas.openxmlformats.org/officeDocument/2006/relationships">
+  <p:cSld>
+    <p:bg>
+      <p:bgPr>
+        <a:solidFill>
+          <a:srgbClr val="0F172A"/>
+        </a:solidFill>
+        <a:effectLst/>
+      </p:bgPr>
+    </p:bg>
+    <p:spTree>
+      <p:nvGrpSpPr>
+        <p:cNvPr id="1" name=""/>
+        <p:cNvGrpSpPr/>
+        <p:nvPr/>
+      </p:nvGrpSpPr>
+      <p:grpSpPr/>
+      <p:sp>
+        <p:nvSpPr>
+          <p:cNvPr id="2" name="Title 1"/>
+          <p:cNvSpPr>
+            <a:spLocks noGrp="1"/>
+          </p:cNvSpPr>
+          <p:nvPr>
+            <p:ph type="title"/>
+          </p:nvPr>
+        </p:nvSpPr>
+        <p:spPr>
+          <a:xfrm>
+            <a:off x="822960" y="1783080"/>
+            <a:ext cx="10545775" cy="1554480"/>
+          </a:xfrm>
+        </p:spPr>
+        <p:txBody>
+          <a:bodyPr wrap="square"/>
+          <a:lstStyle/>
+          <a:p>
+            <a:pPr algn="l">
+              <a:lnSpc>
+                <a:spcPct val="105000"/>
+              </a:lnSpc>
+            </a:pPr>
+            <a:r>
+              <a:rPr sz="3200" b="1">
+                <a:solidFill>
+                  <a:srgbClr val="FFFFFF"/>
+                </a:solidFill>
+                <a:latin typeface="Segoe UI"/>
+              </a:rPr>
+              <a:t>{{ closing_statement }}</a:t>
+            </a:r>
+          </a:p>
+        </p:txBody>
+      </p:sp>
+      <p:sp>
+        <p:nvSpPr>
+          <p:cNvPr id="3" name="Rectangle 2"/>
+          <p:cNvSpPr/>
+          <p:nvPr/>
+        </p:nvSpPr>
+        <p:spPr>
+          <a:xfrm>
+            <a:off x="0" y="0"/>
+            <a:ext cx="256032" cy="6858000"/>
+          </a:xfrm>
+          <a:prstGeom prst="rect">
+            <a:avLst/>
+          </a:prstGeom>
+          <a:solidFill>
+            <a:srgbClr val="2563EB"/>
+          </a:solidFill>
+          <a:ln>
+            <a:noFill/>
+          </a:ln>
+          <a:effectLst/>
+        </p:spPr>
+        <p:style>
+          <a:lnRef idx="1">
+            <a:schemeClr val="accent1"/>
+          </a:lnRef>
+          <a:fillRef idx="3">
+            <a:schemeClr val="accent1"/>
+          </a:fillRef>
+          <a:effectRef idx="2">
+            <a:schemeClr val="accent1"/>
+          </a:effectRef>
+          <a:fontRef idx="minor">
+            <a:schemeClr val="lt1"/>
+          </a:fontRef>
+        </p:style>
+        <p:txBody>
+          <a:bodyPr rtlCol="0" anchor="ctr"/>
+          <a:lstStyle/>
+          <a:p>
+            <a:pPr algn="ctr"/>
+          </a:p>
+        </p:txBody>
+      </p:sp>
+      <p:sp>
+        <p:nvSpPr>
+          <p:cNvPr id="4" name="TextBox 3"/>
+          <p:cNvSpPr txBox="1"/>
+          <p:nvPr/>
+        </p:nvSpPr>
+        <p:spPr>
+          <a:xfrm>
+            <a:off x="822960" y="1280160"/>
+            <a:ext cx="10545775" cy="411480"/>
+          </a:xfrm>
+          <a:prstGeom prst="rect">
+            <a:avLst/>
+          </a:prstGeom>
+          <a:noFill/>
+        </p:spPr>
+        <p:txBody>
+          <a:bodyPr wrap="square" anchor="t">
+            <a:spAutoFit/>
+          </a:bodyPr>
+          <a:lstStyle/>
+          <a:p>
+            <a:pPr algn="l">
+              <a:lnSpc>
+                <a:spcPct val="100000"/>
+              </a:lnSpc>
+            </a:pPr>
+            <a:r>
+              <a:rPr sz="1500" b="1">
+                <a:solidFill>
+                  <a:srgbClr val="0891B2"/>
+                </a:solidFill>
+                <a:latin typeface="Segoe UI"/>
+              </a:rPr>
+              <a:t>CLOSING</a:t>
+            </a:r>
+          </a:p>
+        </p:txBody>
+      </p:sp>
+      <p:sp>
+        <p:nvSpPr>
+          <p:cNvPr id="5" name="TextBox 4"/>
+          <p:cNvSpPr txBox="1"/>
+          <p:nvPr/>
+        </p:nvSpPr>
+        <p:spPr>
+          <a:xfrm>
+            <a:off x="822960" y="3566160"/>
+            <a:ext cx="10545775" cy="2377440"/>
+          </a:xfrm>
+          <a:prstGeom prst="rect">
+            <a:avLst/>
+          </a:prstGeom>
+          <a:noFill/>
+        </p:spPr>
+        <p:txBody>
+          <a:bodyPr wrap="square">
+            <a:spAutoFit/>
+          </a:bodyPr>
+          <a:lstStyle/>
+          <a:p>
+            <a:pPr marL="228600" indent="-228600">
+              <a:lnSpc>
+                <a:spcPct val="120000"/>
+              </a:lnSpc>
+              <a:spcAft>
+                <a:spcPts val="1000"/>
+              </a:spcAft>
+              <a:buFont typeface="Arial" pitchFamily="34" charset="0"/>
+              <a:buChar char="•"/>
+            </a:pPr>
+            <a:r>
+              <a:rPr sz="1900">
+                <a:solidFill>
+                  <a:srgbClr val="F5F7FA"/>
+                </a:solidFill>
+                <a:latin typeface="Segoe UI"/>
+              </a:rPr>
+              <a:t>{{ next_steps }}</a:t>
             </a:r>
           </a:p>
         </p:txBody>
@@ -3359,7 +4271,7 @@
                 </a:solidFill>
                 <a:latin typeface="Segoe UI"/>
               </a:rPr>
-              <a:t>Context and challenge</a:t>
+              <a:t>{{ heading }}</a:t>
             </a:r>
           </a:p>
         </p:txBody>
@@ -3408,89 +4320,152 @@
           </a:p>
         </p:txBody>
       </p:sp>
-      <p:sp>
-        <p:nvSpPr>
-          <p:cNvPr id="4" name="TextBox 3"/>
-          <p:cNvSpPr txBox="1"/>
+      <p:grpSp>
+        <p:nvGrpSpPr>
+          <p:cNvPr id="4" name="ITEM"/>
+          <p:cNvGrpSpPr/>
           <p:nvPr/>
-        </p:nvSpPr>
-        <p:spPr>
-          <a:xfrm>
-            <a:off x="822960" y="2377440"/>
-            <a:ext cx="10545775" cy="822960"/>
-          </a:xfrm>
-          <a:prstGeom prst="rect">
-            <a:avLst/>
-          </a:prstGeom>
-          <a:noFill/>
-        </p:spPr>
-        <p:txBody>
-          <a:bodyPr wrap="square" anchor="t">
-            <a:spAutoFit/>
-          </a:bodyPr>
-          <a:lstStyle/>
-          <a:p>
-            <a:pPr algn="l">
-              <a:lnSpc>
-                <a:spcPct val="125000"/>
-              </a:lnSpc>
-            </a:pPr>
-            <a:r>
-              <a:rPr sz="1700" b="0">
-                <a:solidFill>
-                  <a:srgbClr val="54617A"/>
-                </a:solidFill>
-                <a:latin typeface="Segoe UI"/>
-              </a:rPr>
-              <a:t>{{ problem_statement }}</a:t>
-            </a:r>
-          </a:p>
-        </p:txBody>
-      </p:sp>
-      <p:sp>
-        <p:nvSpPr>
-          <p:cNvPr id="5" name="TextBox 4"/>
-          <p:cNvSpPr txBox="1"/>
-          <p:nvPr/>
-        </p:nvSpPr>
-        <p:spPr>
-          <a:xfrm>
-            <a:off x="822960" y="3200400"/>
-            <a:ext cx="10545775" cy="3017520"/>
-          </a:xfrm>
-          <a:prstGeom prst="rect">
-            <a:avLst/>
-          </a:prstGeom>
-          <a:noFill/>
-        </p:spPr>
-        <p:txBody>
-          <a:bodyPr wrap="square">
-            <a:spAutoFit/>
-          </a:bodyPr>
-          <a:lstStyle/>
-          <a:p>
-            <a:pPr marL="228600" indent="-228600">
-              <a:lnSpc>
-                <a:spcPct val="120000"/>
-              </a:lnSpc>
-              <a:spcAft>
-                <a:spcPts val="1000"/>
-              </a:spcAft>
-              <a:buFont typeface="Arial" pitchFamily="34" charset="0"/>
-              <a:buChar char="•"/>
-            </a:pPr>
-            <a:r>
-              <a:rPr sz="2000">
-                <a:solidFill>
-                  <a:srgbClr val="0F172A"/>
-                </a:solidFill>
-                <a:latin typeface="Segoe UI"/>
-              </a:rPr>
-              <a:t>{{ pain_points }}</a:t>
-            </a:r>
-          </a:p>
-        </p:txBody>
-      </p:sp>
+        </p:nvGrpSpPr>
+        <p:grpSpPr>
+          <a:xfrm>
+            <a:off x="822960" y="2221992"/>
+            <a:ext cx="10545775" cy="630936"/>
+            <a:chOff x="822960" y="2221992"/>
+            <a:chExt cx="10545775" cy="630936"/>
+          </a:xfrm>
+        </p:grpSpPr>
+        <p:sp>
+          <p:nvSpPr>
+            <p:cNvPr id="5" name="Oval 4"/>
+            <p:cNvSpPr/>
+            <p:nvPr/>
+          </p:nvSpPr>
+          <p:spPr>
+            <a:xfrm>
+              <a:off x="822960" y="2240280"/>
+              <a:ext cx="566928" cy="566928"/>
+            </a:xfrm>
+            <a:prstGeom prst="ellipse">
+              <a:avLst/>
+            </a:prstGeom>
+            <a:solidFill>
+              <a:srgbClr val="0F172A"/>
+            </a:solidFill>
+            <a:ln>
+              <a:noFill/>
+            </a:ln>
+            <a:effectLst/>
+          </p:spPr>
+          <p:style>
+            <a:lnRef idx="1">
+              <a:schemeClr val="accent1"/>
+            </a:lnRef>
+            <a:fillRef idx="3">
+              <a:schemeClr val="accent1"/>
+            </a:fillRef>
+            <a:effectRef idx="2">
+              <a:schemeClr val="accent1"/>
+            </a:effectRef>
+            <a:fontRef idx="minor">
+              <a:schemeClr val="lt1"/>
+            </a:fontRef>
+          </p:style>
+          <p:txBody>
+            <a:bodyPr rtlCol="0" anchor="ctr" wrap="none"/>
+            <a:lstStyle/>
+            <a:p>
+              <a:pPr algn="ctr"/>
+              <a:r>
+                <a:rPr sz="1800" b="1">
+                  <a:solidFill>
+                    <a:srgbClr val="FFFFFF"/>
+                  </a:solidFill>
+                  <a:latin typeface="Segoe UI"/>
+                </a:rPr>
+                <a:t>{{ item._n }}</a:t>
+              </a:r>
+            </a:p>
+          </p:txBody>
+        </p:sp>
+        <p:sp>
+          <p:nvSpPr>
+            <p:cNvPr id="6" name="TextBox 5"/>
+            <p:cNvSpPr txBox="1"/>
+            <p:nvPr/>
+          </p:nvSpPr>
+          <p:spPr>
+            <a:xfrm>
+              <a:off x="1709928" y="2221992"/>
+              <a:ext cx="9658807" cy="365760"/>
+            </a:xfrm>
+            <a:prstGeom prst="rect">
+              <a:avLst/>
+            </a:prstGeom>
+            <a:noFill/>
+          </p:spPr>
+          <p:txBody>
+            <a:bodyPr wrap="square" anchor="t">
+              <a:spAutoFit/>
+            </a:bodyPr>
+            <a:lstStyle/>
+            <a:p>
+              <a:pPr algn="l">
+                <a:lnSpc>
+                  <a:spcPct val="100000"/>
+                </a:lnSpc>
+              </a:pPr>
+              <a:r>
+                <a:rPr sz="1700" b="1">
+                  <a:solidFill>
+                    <a:srgbClr val="0F172A"/>
+                  </a:solidFill>
+                  <a:latin typeface="Segoe UI"/>
+                </a:rPr>
+                <a:t>{{ item.title }}</a:t>
+              </a:r>
+            </a:p>
+          </p:txBody>
+        </p:sp>
+        <p:sp>
+          <p:nvSpPr>
+            <p:cNvPr id="7" name="TextBox 6"/>
+            <p:cNvSpPr txBox="1"/>
+            <p:nvPr/>
+          </p:nvSpPr>
+          <p:spPr>
+            <a:xfrm>
+              <a:off x="1709928" y="2532888"/>
+              <a:ext cx="9658807" cy="320040"/>
+            </a:xfrm>
+            <a:prstGeom prst="rect">
+              <a:avLst/>
+            </a:prstGeom>
+            <a:noFill/>
+          </p:spPr>
+          <p:txBody>
+            <a:bodyPr wrap="square" anchor="t">
+              <a:spAutoFit/>
+            </a:bodyPr>
+            <a:lstStyle/>
+            <a:p>
+              <a:pPr algn="l">
+                <a:lnSpc>
+                  <a:spcPct val="100000"/>
+                </a:lnSpc>
+              </a:pPr>
+              <a:r>
+                <a:rPr sz="1250" b="0">
+                  <a:solidFill>
+                    <a:srgbClr val="54617A"/>
+                  </a:solidFill>
+                  <a:latin typeface="Segoe UI"/>
+                </a:rPr>
+                <a:t>{{ item.text }}</a:t>
+              </a:r>
+            </a:p>
+          </p:txBody>
+        </p:sp>
+      </p:grpSp>
     </p:spTree>
   </p:cSld>
   <p:clrMapOvr>
@@ -3549,7 +4524,7 @@
                 </a:solidFill>
                 <a:latin typeface="Segoe UI"/>
               </a:rPr>
-              <a:t>Our approach</a:t>
+              <a:t>{{ heading }}</a:t>
             </a:r>
           </a:p>
         </p:txBody>
@@ -3632,7 +4607,7 @@
                 </a:solidFill>
                 <a:latin typeface="Segoe UI"/>
               </a:rPr>
-              <a:t>{{ approach_summary }}</a:t>
+              <a:t>{{ intro }}</a:t>
             </a:r>
           </a:p>
         </p:txBody>
@@ -3676,7 +4651,7 @@
                 </a:solidFill>
                 <a:latin typeface="Segoe UI"/>
               </a:rPr>
-              <a:t>{{ approach_steps }}</a:t>
+              <a:t>{{ points }}</a:t>
             </a:r>
           </a:p>
         </p:txBody>
@@ -3739,7 +4714,7 @@
                 </a:solidFill>
                 <a:latin typeface="Segoe UI"/>
               </a:rPr>
-              <a:t>Scope and deliverables</a:t>
+              <a:t>{{ heading }}</a:t>
             </a:r>
           </a:p>
         </p:txBody>
@@ -3788,50 +4763,152 @@
           </a:p>
         </p:txBody>
       </p:sp>
-      <p:sp>
-        <p:nvSpPr>
-          <p:cNvPr id="4" name="TextBox 3"/>
-          <p:cNvSpPr txBox="1"/>
+      <p:grpSp>
+        <p:nvGrpSpPr>
+          <p:cNvPr id="4" name="ITEM"/>
+          <p:cNvGrpSpPr/>
           <p:nvPr/>
-        </p:nvSpPr>
-        <p:spPr>
-          <a:xfrm>
-            <a:off x="822960" y="2377440"/>
-            <a:ext cx="10545775" cy="3840480"/>
-          </a:xfrm>
-          <a:prstGeom prst="rect">
-            <a:avLst/>
-          </a:prstGeom>
-          <a:noFill/>
-        </p:spPr>
-        <p:txBody>
-          <a:bodyPr wrap="square">
-            <a:spAutoFit/>
-          </a:bodyPr>
-          <a:lstStyle/>
-          <a:p>
-            <a:pPr marL="228600" indent="-228600">
-              <a:lnSpc>
-                <a:spcPct val="120000"/>
-              </a:lnSpc>
-              <a:spcAft>
-                <a:spcPts val="1000"/>
-              </a:spcAft>
-              <a:buFont typeface="Arial" pitchFamily="34" charset="0"/>
-              <a:buChar char="•"/>
-            </a:pPr>
-            <a:r>
-              <a:rPr sz="2000">
-                <a:solidFill>
-                  <a:srgbClr val="0F172A"/>
-                </a:solidFill>
-                <a:latin typeface="Segoe UI"/>
-              </a:rPr>
-              <a:t>{{ scope_items }}</a:t>
-            </a:r>
-          </a:p>
-        </p:txBody>
-      </p:sp>
+        </p:nvGrpSpPr>
+        <p:grpSpPr>
+          <a:xfrm>
+            <a:off x="822960" y="2221992"/>
+            <a:ext cx="10545775" cy="658368"/>
+            <a:chOff x="822960" y="2221992"/>
+            <a:chExt cx="10545775" cy="658368"/>
+          </a:xfrm>
+        </p:grpSpPr>
+        <p:sp>
+          <p:nvSpPr>
+            <p:cNvPr id="5" name="Chevron 4"/>
+            <p:cNvSpPr/>
+            <p:nvPr/>
+          </p:nvSpPr>
+          <p:spPr>
+            <a:xfrm>
+              <a:off x="822960" y="2240280"/>
+              <a:ext cx="777240" cy="640080"/>
+            </a:xfrm>
+            <a:prstGeom prst="chevron">
+              <a:avLst/>
+            </a:prstGeom>
+            <a:solidFill>
+              <a:srgbClr val="0F172A"/>
+            </a:solidFill>
+            <a:ln>
+              <a:noFill/>
+            </a:ln>
+            <a:effectLst/>
+          </p:spPr>
+          <p:style>
+            <a:lnRef idx="1">
+              <a:schemeClr val="accent1"/>
+            </a:lnRef>
+            <a:fillRef idx="3">
+              <a:schemeClr val="accent1"/>
+            </a:fillRef>
+            <a:effectRef idx="2">
+              <a:schemeClr val="accent1"/>
+            </a:effectRef>
+            <a:fontRef idx="minor">
+              <a:schemeClr val="lt1"/>
+            </a:fontRef>
+          </p:style>
+          <p:txBody>
+            <a:bodyPr rtlCol="0" anchor="ctr"/>
+            <a:lstStyle/>
+            <a:p>
+              <a:pPr algn="ctr"/>
+              <a:r>
+                <a:rPr sz="1600" b="1">
+                  <a:solidFill>
+                    <a:srgbClr val="FFFFFF"/>
+                  </a:solidFill>
+                  <a:latin typeface="Segoe UI"/>
+                </a:rPr>
+                <a:t>{{ item._n }}</a:t>
+              </a:r>
+            </a:p>
+          </p:txBody>
+        </p:sp>
+        <p:sp>
+          <p:nvSpPr>
+            <p:cNvPr id="6" name="TextBox 5"/>
+            <p:cNvSpPr txBox="1"/>
+            <p:nvPr/>
+          </p:nvSpPr>
+          <p:spPr>
+            <a:xfrm>
+              <a:off x="1920240" y="2221992"/>
+              <a:ext cx="9448495" cy="365760"/>
+            </a:xfrm>
+            <a:prstGeom prst="rect">
+              <a:avLst/>
+            </a:prstGeom>
+            <a:noFill/>
+          </p:spPr>
+          <p:txBody>
+            <a:bodyPr wrap="square" anchor="t">
+              <a:spAutoFit/>
+            </a:bodyPr>
+            <a:lstStyle/>
+            <a:p>
+              <a:pPr algn="l">
+                <a:lnSpc>
+                  <a:spcPct val="100000"/>
+                </a:lnSpc>
+              </a:pPr>
+              <a:r>
+                <a:rPr sz="1650" b="1">
+                  <a:solidFill>
+                    <a:srgbClr val="0F172A"/>
+                  </a:solidFill>
+                  <a:latin typeface="Segoe UI"/>
+                </a:rPr>
+                <a:t>{{ item.title }}</a:t>
+              </a:r>
+            </a:p>
+          </p:txBody>
+        </p:sp>
+        <p:sp>
+          <p:nvSpPr>
+            <p:cNvPr id="7" name="TextBox 6"/>
+            <p:cNvSpPr txBox="1"/>
+            <p:nvPr/>
+          </p:nvSpPr>
+          <p:spPr>
+            <a:xfrm>
+              <a:off x="1920240" y="2551176"/>
+              <a:ext cx="9448495" cy="320040"/>
+            </a:xfrm>
+            <a:prstGeom prst="rect">
+              <a:avLst/>
+            </a:prstGeom>
+            <a:noFill/>
+          </p:spPr>
+          <p:txBody>
+            <a:bodyPr wrap="square" anchor="t">
+              <a:spAutoFit/>
+            </a:bodyPr>
+            <a:lstStyle/>
+            <a:p>
+              <a:pPr algn="l">
+                <a:lnSpc>
+                  <a:spcPct val="100000"/>
+                </a:lnSpc>
+              </a:pPr>
+              <a:r>
+                <a:rPr sz="1250" b="0">
+                  <a:solidFill>
+                    <a:srgbClr val="54617A"/>
+                  </a:solidFill>
+                  <a:latin typeface="Segoe UI"/>
+                </a:rPr>
+                <a:t>{{ item.text }}</a:t>
+              </a:r>
+            </a:p>
+          </p:txBody>
+        </p:sp>
+      </p:grpSp>
     </p:spTree>
   </p:cSld>
   <p:clrMapOvr>
@@ -3890,7 +4967,7 @@
                 </a:solidFill>
                 <a:latin typeface="Segoe UI"/>
               </a:rPr>
-              <a:t>The team</a:t>
+              <a:t>{{ heading }}</a:t>
             </a:r>
           </a:p>
         </p:txBody>
@@ -3939,50 +5016,226 @@
           </a:p>
         </p:txBody>
       </p:sp>
-      <p:sp>
-        <p:nvSpPr>
-          <p:cNvPr id="4" name="TextBox 3"/>
-          <p:cNvSpPr txBox="1"/>
+      <p:grpSp>
+        <p:nvGrpSpPr>
+          <p:cNvPr id="4" name="ITEM"/>
+          <p:cNvGrpSpPr/>
           <p:nvPr/>
-        </p:nvSpPr>
-        <p:spPr>
-          <a:xfrm>
-            <a:off x="822960" y="2377440"/>
-            <a:ext cx="10545775" cy="3840480"/>
-          </a:xfrm>
-          <a:prstGeom prst="rect">
-            <a:avLst/>
-          </a:prstGeom>
-          <a:noFill/>
-        </p:spPr>
-        <p:txBody>
-          <a:bodyPr wrap="square">
-            <a:spAutoFit/>
-          </a:bodyPr>
-          <a:lstStyle/>
-          <a:p>
-            <a:pPr marL="228600" indent="-228600">
-              <a:lnSpc>
-                <a:spcPct val="120000"/>
-              </a:lnSpc>
-              <a:spcAft>
-                <a:spcPts val="1000"/>
-              </a:spcAft>
-              <a:buFont typeface="Arial" pitchFamily="34" charset="0"/>
-              <a:buChar char="•"/>
-            </a:pPr>
-            <a:r>
-              <a:rPr sz="2000">
-                <a:solidFill>
-                  <a:srgbClr val="0F172A"/>
-                </a:solidFill>
-                <a:latin typeface="Segoe UI"/>
-              </a:rPr>
-              <a:t>{{ team_members }}</a:t>
-            </a:r>
-          </a:p>
-        </p:txBody>
-      </p:sp>
+        </p:nvGrpSpPr>
+        <p:grpSpPr>
+          <a:xfrm>
+            <a:off x="822960" y="2651760"/>
+            <a:ext cx="2514600" cy="2286000"/>
+            <a:chOff x="822960" y="2651760"/>
+            <a:chExt cx="2514600" cy="2286000"/>
+          </a:xfrm>
+        </p:grpSpPr>
+        <p:sp>
+          <p:nvSpPr>
+            <p:cNvPr id="5" name="Rounded Rectangle 4"/>
+            <p:cNvSpPr/>
+            <p:nvPr/>
+          </p:nvSpPr>
+          <p:spPr>
+            <a:xfrm>
+              <a:off x="822960" y="2651760"/>
+              <a:ext cx="2514600" cy="2286000"/>
+            </a:xfrm>
+            <a:prstGeom prst="roundRect">
+              <a:avLst/>
+            </a:prstGeom>
+            <a:solidFill>
+              <a:srgbClr val="F1F5F9"/>
+            </a:solidFill>
+            <a:ln>
+              <a:noFill/>
+            </a:ln>
+            <a:effectLst/>
+          </p:spPr>
+          <p:style>
+            <a:lnRef idx="1">
+              <a:schemeClr val="accent1"/>
+            </a:lnRef>
+            <a:fillRef idx="3">
+              <a:schemeClr val="accent1"/>
+            </a:fillRef>
+            <a:effectRef idx="2">
+              <a:schemeClr val="accent1"/>
+            </a:effectRef>
+            <a:fontRef idx="minor">
+              <a:schemeClr val="lt1"/>
+            </a:fontRef>
+          </p:style>
+          <p:txBody>
+            <a:bodyPr rtlCol="0" anchor="ctr"/>
+            <a:lstStyle/>
+            <a:p>
+              <a:pPr algn="ctr"/>
+            </a:p>
+          </p:txBody>
+        </p:sp>
+        <p:sp>
+          <p:nvSpPr>
+            <p:cNvPr id="6" name="Rounded Rectangle 5"/>
+            <p:cNvSpPr/>
+            <p:nvPr/>
+          </p:nvSpPr>
+          <p:spPr>
+            <a:xfrm>
+              <a:off x="1051560" y="2880360"/>
+              <a:ext cx="548640" cy="109728"/>
+            </a:xfrm>
+            <a:prstGeom prst="roundRect">
+              <a:avLst/>
+            </a:prstGeom>
+            <a:solidFill>
+              <a:srgbClr val="0F172A"/>
+            </a:solidFill>
+            <a:ln>
+              <a:noFill/>
+            </a:ln>
+            <a:effectLst/>
+          </p:spPr>
+          <p:style>
+            <a:lnRef idx="1">
+              <a:schemeClr val="accent1"/>
+            </a:lnRef>
+            <a:fillRef idx="3">
+              <a:schemeClr val="accent1"/>
+            </a:fillRef>
+            <a:effectRef idx="2">
+              <a:schemeClr val="accent1"/>
+            </a:effectRef>
+            <a:fontRef idx="minor">
+              <a:schemeClr val="lt1"/>
+            </a:fontRef>
+          </p:style>
+          <p:txBody>
+            <a:bodyPr rtlCol="0" anchor="ctr"/>
+            <a:lstStyle/>
+            <a:p>
+              <a:pPr algn="ctr"/>
+            </a:p>
+          </p:txBody>
+        </p:sp>
+        <p:sp>
+          <p:nvSpPr>
+            <p:cNvPr id="7" name="TextBox 6"/>
+            <p:cNvSpPr txBox="1"/>
+            <p:nvPr/>
+          </p:nvSpPr>
+          <p:spPr>
+            <a:xfrm>
+              <a:off x="1051560" y="3154680"/>
+              <a:ext cx="2057400" cy="365760"/>
+            </a:xfrm>
+            <a:prstGeom prst="rect">
+              <a:avLst/>
+            </a:prstGeom>
+            <a:noFill/>
+          </p:spPr>
+          <p:txBody>
+            <a:bodyPr wrap="square" anchor="t">
+              <a:spAutoFit/>
+            </a:bodyPr>
+            <a:lstStyle/>
+            <a:p>
+              <a:pPr algn="l">
+                <a:lnSpc>
+                  <a:spcPct val="100000"/>
+                </a:lnSpc>
+              </a:pPr>
+              <a:r>
+                <a:rPr sz="1200" b="1">
+                  <a:solidFill>
+                    <a:srgbClr val="54617A"/>
+                  </a:solidFill>
+                  <a:latin typeface="Segoe UI"/>
+                </a:rPr>
+                <a:t>{{ item.label }}</a:t>
+              </a:r>
+            </a:p>
+          </p:txBody>
+        </p:sp>
+        <p:sp>
+          <p:nvSpPr>
+            <p:cNvPr id="8" name="TextBox 7"/>
+            <p:cNvSpPr txBox="1"/>
+            <p:nvPr/>
+          </p:nvSpPr>
+          <p:spPr>
+            <a:xfrm>
+              <a:off x="1051560" y="3566160"/>
+              <a:ext cx="2057400" cy="731520"/>
+            </a:xfrm>
+            <a:prstGeom prst="rect">
+              <a:avLst/>
+            </a:prstGeom>
+            <a:noFill/>
+          </p:spPr>
+          <p:txBody>
+            <a:bodyPr wrap="square" anchor="t">
+              <a:spAutoFit/>
+            </a:bodyPr>
+            <a:lstStyle/>
+            <a:p>
+              <a:pPr algn="l">
+                <a:lnSpc>
+                  <a:spcPct val="100000"/>
+                </a:lnSpc>
+              </a:pPr>
+              <a:r>
+                <a:rPr sz="2800" b="1">
+                  <a:solidFill>
+                    <a:srgbClr val="0F172A"/>
+                  </a:solidFill>
+                  <a:latin typeface="Segoe UI"/>
+                </a:rPr>
+                <a:t>{{ item.value }}</a:t>
+              </a:r>
+            </a:p>
+          </p:txBody>
+        </p:sp>
+        <p:sp>
+          <p:nvSpPr>
+            <p:cNvPr id="9" name="TextBox 8"/>
+            <p:cNvSpPr txBox="1"/>
+            <p:nvPr/>
+          </p:nvSpPr>
+          <p:spPr>
+            <a:xfrm>
+              <a:off x="1051560" y="4389120"/>
+              <a:ext cx="2057400" cy="411480"/>
+            </a:xfrm>
+            <a:prstGeom prst="rect">
+              <a:avLst/>
+            </a:prstGeom>
+            <a:noFill/>
+          </p:spPr>
+          <p:txBody>
+            <a:bodyPr wrap="square" anchor="t">
+              <a:spAutoFit/>
+            </a:bodyPr>
+            <a:lstStyle/>
+            <a:p>
+              <a:pPr algn="l">
+                <a:lnSpc>
+                  <a:spcPct val="100000"/>
+                </a:lnSpc>
+              </a:pPr>
+              <a:r>
+                <a:rPr sz="1250" b="0">
+                  <a:solidFill>
+                    <a:srgbClr val="2563EB"/>
+                  </a:solidFill>
+                  <a:latin typeface="Segoe UI"/>
+                </a:rPr>
+                <a:t>{{ item.note }}</a:t>
+              </a:r>
+            </a:p>
+          </p:txBody>
+        </p:sp>
+      </p:grpSp>
     </p:spTree>
   </p:cSld>
   <p:clrMapOvr>
@@ -4041,7 +5294,7 @@
                 </a:solidFill>
                 <a:latin typeface="Segoe UI"/>
               </a:rPr>
-              <a:t>Timeline and investment</a:t>
+              <a:t>{{ heading }}</a:t>
             </a:r>
           </a:p>
         </p:txBody>
@@ -4098,8 +5351,8 @@
         </p:nvSpPr>
         <p:spPr>
           <a:xfrm>
-            <a:off x="822960" y="2377440"/>
-            <a:ext cx="10545775" cy="822960"/>
+            <a:off x="822960" y="2468880"/>
+            <a:ext cx="4998567" cy="365760"/>
           </a:xfrm>
           <a:prstGeom prst="rect">
             <a:avLst/>
@@ -4114,17 +5367,17 @@
           <a:p>
             <a:pPr algn="l">
               <a:lnSpc>
-                <a:spcPct val="125000"/>
+                <a:spcPct val="100000"/>
               </a:lnSpc>
             </a:pPr>
             <a:r>
-              <a:rPr sz="1700" b="0">
+              <a:rPr sz="1300" b="1">
                 <a:solidFill>
-                  <a:srgbClr val="54617A"/>
+                  <a:srgbClr val="2563EB"/>
                 </a:solidFill>
                 <a:latin typeface="Segoe UI"/>
               </a:rPr>
-              <a:t>{{ investment_summary }}</a:t>
+              <a:t>{{ left_label }}</a:t>
             </a:r>
           </a:p>
         </p:txBody>
@@ -4137,8 +5390,8 @@
         </p:nvSpPr>
         <p:spPr>
           <a:xfrm>
-            <a:off x="822960" y="3200400"/>
-            <a:ext cx="10545775" cy="3017520"/>
+            <a:off x="822960" y="2971800"/>
+            <a:ext cx="4998567" cy="3291840"/>
           </a:xfrm>
           <a:prstGeom prst="rect">
             <a:avLst/>
@@ -4162,13 +5415,96 @@
               <a:buChar char="•"/>
             </a:pPr>
             <a:r>
-              <a:rPr sz="1800">
+              <a:rPr sz="1700">
                 <a:solidFill>
                   <a:srgbClr val="0F172A"/>
                 </a:solidFill>
                 <a:latin typeface="Segoe UI"/>
               </a:rPr>
-              <a:t>{{ investment_lines }}</a:t>
+              <a:t>{{ left_items }}</a:t>
+            </a:r>
+          </a:p>
+        </p:txBody>
+      </p:sp>
+      <p:sp>
+        <p:nvSpPr>
+          <p:cNvPr id="6" name="TextBox 5"/>
+          <p:cNvSpPr txBox="1"/>
+          <p:nvPr/>
+        </p:nvSpPr>
+        <p:spPr>
+          <a:xfrm>
+            <a:off x="6370167" y="2468880"/>
+            <a:ext cx="4998567" cy="365760"/>
+          </a:xfrm>
+          <a:prstGeom prst="rect">
+            <a:avLst/>
+          </a:prstGeom>
+          <a:noFill/>
+        </p:spPr>
+        <p:txBody>
+          <a:bodyPr wrap="square" anchor="t">
+            <a:spAutoFit/>
+          </a:bodyPr>
+          <a:lstStyle/>
+          <a:p>
+            <a:pPr algn="l">
+              <a:lnSpc>
+                <a:spcPct val="100000"/>
+              </a:lnSpc>
+            </a:pPr>
+            <a:r>
+              <a:rPr sz="1300" b="1">
+                <a:solidFill>
+                  <a:srgbClr val="2563EB"/>
+                </a:solidFill>
+                <a:latin typeface="Segoe UI"/>
+              </a:rPr>
+              <a:t>{{ right_label }}</a:t>
+            </a:r>
+          </a:p>
+        </p:txBody>
+      </p:sp>
+      <p:sp>
+        <p:nvSpPr>
+          <p:cNvPr id="7" name="TextBox 6"/>
+          <p:cNvSpPr txBox="1"/>
+          <p:nvPr/>
+        </p:nvSpPr>
+        <p:spPr>
+          <a:xfrm>
+            <a:off x="6370167" y="2971800"/>
+            <a:ext cx="4998567" cy="3291840"/>
+          </a:xfrm>
+          <a:prstGeom prst="rect">
+            <a:avLst/>
+          </a:prstGeom>
+          <a:noFill/>
+        </p:spPr>
+        <p:txBody>
+          <a:bodyPr wrap="square">
+            <a:spAutoFit/>
+          </a:bodyPr>
+          <a:lstStyle/>
+          <a:p>
+            <a:pPr marL="228600" indent="-228600">
+              <a:lnSpc>
+                <a:spcPct val="120000"/>
+              </a:lnSpc>
+              <a:spcAft>
+                <a:spcPts val="1000"/>
+              </a:spcAft>
+              <a:buFont typeface="Arial" pitchFamily="34" charset="0"/>
+              <a:buChar char="•"/>
+            </a:pPr>
+            <a:r>
+              <a:rPr sz="1700">
+                <a:solidFill>
+                  <a:srgbClr val="0F172A"/>
+                </a:solidFill>
+                <a:latin typeface="Segoe UI"/>
+              </a:rPr>
+              <a:t>{{ right_items }}</a:t>
             </a:r>
           </a:p>
         </p:txBody>
@@ -4231,7 +5567,7 @@
                 </a:solidFill>
                 <a:latin typeface="Segoe UI"/>
               </a:rPr>
-              <a:t>{{ topic_heading }}</a:t>
+              <a:t>{{ heading }}</a:t>
             </a:r>
           </a:p>
         </p:txBody>
@@ -4280,50 +5616,191 @@
           </a:p>
         </p:txBody>
       </p:sp>
-      <p:sp>
-        <p:nvSpPr>
-          <p:cNvPr id="4" name="TextBox 3"/>
-          <p:cNvSpPr txBox="1"/>
+      <p:grpSp>
+        <p:nvGrpSpPr>
+          <p:cNvPr id="4" name="ITEM"/>
+          <p:cNvGrpSpPr/>
           <p:nvPr/>
-        </p:nvSpPr>
-        <p:spPr>
-          <a:xfrm>
-            <a:off x="822960" y="2377440"/>
-            <a:ext cx="10545775" cy="3840480"/>
-          </a:xfrm>
-          <a:prstGeom prst="rect">
-            <a:avLst/>
-          </a:prstGeom>
-          <a:noFill/>
-        </p:spPr>
-        <p:txBody>
-          <a:bodyPr wrap="square">
-            <a:spAutoFit/>
-          </a:bodyPr>
-          <a:lstStyle/>
-          <a:p>
-            <a:pPr marL="228600" indent="-228600">
-              <a:lnSpc>
-                <a:spcPct val="120000"/>
-              </a:lnSpc>
-              <a:spcAft>
-                <a:spcPts val="1000"/>
-              </a:spcAft>
-              <a:buFont typeface="Arial" pitchFamily="34" charset="0"/>
-              <a:buChar char="•"/>
-            </a:pPr>
-            <a:r>
-              <a:rPr sz="2000">
-                <a:solidFill>
-                  <a:srgbClr val="0F172A"/>
-                </a:solidFill>
-                <a:latin typeface="Segoe UI"/>
-              </a:rPr>
-              <a:t>{{ topic_points }}</a:t>
-            </a:r>
-          </a:p>
-        </p:txBody>
-      </p:sp>
+        </p:nvGrpSpPr>
+        <p:grpSpPr>
+          <a:xfrm>
+            <a:off x="822960" y="2194560"/>
+            <a:ext cx="10545775" cy="667512"/>
+            <a:chOff x="822960" y="2194560"/>
+            <a:chExt cx="10545775" cy="667512"/>
+          </a:xfrm>
+        </p:grpSpPr>
+        <p:sp>
+          <p:nvSpPr>
+            <p:cNvPr id="5" name="Oval 4"/>
+            <p:cNvSpPr/>
+            <p:nvPr/>
+          </p:nvSpPr>
+          <p:spPr>
+            <a:xfrm>
+              <a:off x="822960" y="2194560"/>
+              <a:ext cx="658368" cy="658368"/>
+            </a:xfrm>
+            <a:prstGeom prst="ellipse">
+              <a:avLst/>
+            </a:prstGeom>
+            <a:solidFill>
+              <a:srgbClr val="0F172A"/>
+            </a:solidFill>
+            <a:ln>
+              <a:noFill/>
+            </a:ln>
+            <a:effectLst/>
+          </p:spPr>
+          <p:style>
+            <a:lnRef idx="1">
+              <a:schemeClr val="accent1"/>
+            </a:lnRef>
+            <a:fillRef idx="3">
+              <a:schemeClr val="accent1"/>
+            </a:fillRef>
+            <a:effectRef idx="2">
+              <a:schemeClr val="accent1"/>
+            </a:effectRef>
+            <a:fontRef idx="minor">
+              <a:schemeClr val="lt1"/>
+            </a:fontRef>
+          </p:style>
+          <p:txBody>
+            <a:bodyPr rtlCol="0" anchor="ctr" wrap="none" lIns="0" rIns="0"/>
+            <a:lstStyle/>
+            <a:p>
+              <a:pPr algn="ctr"/>
+              <a:r>
+                <a:rPr sz="1500" b="1">
+                  <a:solidFill>
+                    <a:srgbClr val="FFFFFF"/>
+                  </a:solidFill>
+                  <a:latin typeface="Segoe UI"/>
+                </a:rPr>
+                <a:t>{{ item.initials }}</a:t>
+              </a:r>
+            </a:p>
+          </p:txBody>
+        </p:sp>
+        <p:sp>
+          <p:nvSpPr>
+            <p:cNvPr id="6" name="TextBox 5"/>
+            <p:cNvSpPr txBox="1"/>
+            <p:nvPr/>
+          </p:nvSpPr>
+          <p:spPr>
+            <a:xfrm>
+              <a:off x="1801368" y="2194560"/>
+              <a:ext cx="4206240" cy="365760"/>
+            </a:xfrm>
+            <a:prstGeom prst="rect">
+              <a:avLst/>
+            </a:prstGeom>
+            <a:noFill/>
+          </p:spPr>
+          <p:txBody>
+            <a:bodyPr wrap="square" anchor="t">
+              <a:spAutoFit/>
+            </a:bodyPr>
+            <a:lstStyle/>
+            <a:p>
+              <a:pPr algn="l">
+                <a:lnSpc>
+                  <a:spcPct val="100000"/>
+                </a:lnSpc>
+              </a:pPr>
+              <a:r>
+                <a:rPr sz="1600" b="1">
+                  <a:solidFill>
+                    <a:srgbClr val="0F172A"/>
+                  </a:solidFill>
+                  <a:latin typeface="Segoe UI"/>
+                </a:rPr>
+                <a:t>{{ item.name }}</a:t>
+              </a:r>
+            </a:p>
+          </p:txBody>
+        </p:sp>
+        <p:sp>
+          <p:nvSpPr>
+            <p:cNvPr id="7" name="TextBox 6"/>
+            <p:cNvSpPr txBox="1"/>
+            <p:nvPr/>
+          </p:nvSpPr>
+          <p:spPr>
+            <a:xfrm>
+              <a:off x="1801368" y="2542032"/>
+              <a:ext cx="4206240" cy="320040"/>
+            </a:xfrm>
+            <a:prstGeom prst="rect">
+              <a:avLst/>
+            </a:prstGeom>
+            <a:noFill/>
+          </p:spPr>
+          <p:txBody>
+            <a:bodyPr wrap="square" anchor="t">
+              <a:spAutoFit/>
+            </a:bodyPr>
+            <a:lstStyle/>
+            <a:p>
+              <a:pPr algn="l">
+                <a:lnSpc>
+                  <a:spcPct val="100000"/>
+                </a:lnSpc>
+              </a:pPr>
+              <a:r>
+                <a:rPr sz="1250" b="1">
+                  <a:solidFill>
+                    <a:srgbClr val="2563EB"/>
+                  </a:solidFill>
+                  <a:latin typeface="Segoe UI"/>
+                </a:rPr>
+                <a:t>{{ item.role }}</a:t>
+              </a:r>
+            </a:p>
+          </p:txBody>
+        </p:sp>
+        <p:sp>
+          <p:nvSpPr>
+            <p:cNvPr id="8" name="TextBox 7"/>
+            <p:cNvSpPr txBox="1"/>
+            <p:nvPr/>
+          </p:nvSpPr>
+          <p:spPr>
+            <a:xfrm>
+              <a:off x="6492240" y="2286000"/>
+              <a:ext cx="4876495" cy="548640"/>
+            </a:xfrm>
+            <a:prstGeom prst="rect">
+              <a:avLst/>
+            </a:prstGeom>
+            <a:noFill/>
+          </p:spPr>
+          <p:txBody>
+            <a:bodyPr wrap="square" anchor="t">
+              <a:spAutoFit/>
+            </a:bodyPr>
+            <a:lstStyle/>
+            <a:p>
+              <a:pPr algn="l">
+                <a:lnSpc>
+                  <a:spcPct val="100000"/>
+                </a:lnSpc>
+              </a:pPr>
+              <a:r>
+                <a:rPr sz="1250" b="0">
+                  <a:solidFill>
+                    <a:srgbClr val="54617A"/>
+                  </a:solidFill>
+                  <a:latin typeface="Segoe UI"/>
+                </a:rPr>
+                <a:t>{{ item.note }}</a:t>
+              </a:r>
+            </a:p>
+          </p:txBody>
+        </p:sp>
+      </p:grpSp>
     </p:spTree>
   </p:cSld>
   <p:clrMapOvr>
@@ -4338,7 +5815,7 @@
     <p:bg>
       <p:bgPr>
         <a:solidFill>
-          <a:srgbClr val="0F172A"/>
+          <a:srgbClr val="FFFFFF"/>
         </a:solidFill>
         <a:effectLst/>
       </p:bgPr>
@@ -4362,8 +5839,8 @@
         </p:nvSpPr>
         <p:spPr>
           <a:xfrm>
-            <a:off x="822960" y="1783080"/>
-            <a:ext cx="10545775" cy="1554480"/>
+            <a:off x="822960" y="1051560"/>
+            <a:ext cx="10545775" cy="1188720"/>
           </a:xfrm>
         </p:spPr>
         <p:txBody>
@@ -4378,11 +5855,11 @@
             <a:r>
               <a:rPr sz="3200" b="1">
                 <a:solidFill>
-                  <a:srgbClr val="FFFFFF"/>
+                  <a:srgbClr val="0F172A"/>
                 </a:solidFill>
                 <a:latin typeface="Segoe UI"/>
               </a:rPr>
-              <a:t>{{ value_statement }}</a:t>
+              <a:t>{{ heading }}</a:t>
             </a:r>
           </a:p>
         </p:txBody>
@@ -4395,8 +5872,8 @@
         </p:nvSpPr>
         <p:spPr>
           <a:xfrm>
-            <a:off x="0" y="0"/>
-            <a:ext cx="256032" cy="6858000"/>
+            <a:off x="822960" y="822960"/>
+            <a:ext cx="822960" cy="128016"/>
           </a:xfrm>
           <a:prstGeom prst="rect">
             <a:avLst/>
@@ -4433,13 +5910,397 @@
       </p:sp>
       <p:sp>
         <p:nvSpPr>
-          <p:cNvPr id="4" name="TextBox 3"/>
+          <p:cNvPr id="4" name="Rectangle 3"/>
+          <p:cNvSpPr/>
+          <p:nvPr/>
+        </p:nvSpPr>
+        <p:spPr>
+          <a:xfrm>
+            <a:off x="822960" y="3694176"/>
+            <a:ext cx="10545775" cy="27432"/>
+          </a:xfrm>
+          <a:prstGeom prst="rect">
+            <a:avLst/>
+          </a:prstGeom>
+          <a:solidFill>
+            <a:srgbClr val="E2E8F0"/>
+          </a:solidFill>
+          <a:ln>
+            <a:noFill/>
+          </a:ln>
+          <a:effectLst/>
+        </p:spPr>
+        <p:style>
+          <a:lnRef idx="1">
+            <a:schemeClr val="accent1"/>
+          </a:lnRef>
+          <a:fillRef idx="3">
+            <a:schemeClr val="accent1"/>
+          </a:fillRef>
+          <a:effectRef idx="2">
+            <a:schemeClr val="accent1"/>
+          </a:effectRef>
+          <a:fontRef idx="minor">
+            <a:schemeClr val="lt1"/>
+          </a:fontRef>
+        </p:style>
+        <p:txBody>
+          <a:bodyPr rtlCol="0" anchor="ctr"/>
+          <a:lstStyle/>
+          <a:p>
+            <a:pPr algn="ctr"/>
+          </a:p>
+        </p:txBody>
+      </p:sp>
+      <p:grpSp>
+        <p:nvGrpSpPr>
+          <p:cNvPr id="5" name="ITEM"/>
+          <p:cNvGrpSpPr/>
+          <p:nvPr/>
+        </p:nvGrpSpPr>
+        <p:grpSpPr>
+          <a:xfrm>
+            <a:off x="822960" y="2697480"/>
+            <a:ext cx="1965960" cy="2788920"/>
+            <a:chOff x="822960" y="2697480"/>
+            <a:chExt cx="1965960" cy="2788920"/>
+          </a:xfrm>
+        </p:grpSpPr>
+        <p:sp>
+          <p:nvSpPr>
+            <p:cNvPr id="6" name="Oval 5"/>
+            <p:cNvSpPr/>
+            <p:nvPr/>
+          </p:nvSpPr>
+          <p:spPr>
+            <a:xfrm>
+              <a:off x="1645920" y="3566160"/>
+              <a:ext cx="310896" cy="310896"/>
+            </a:xfrm>
+            <a:prstGeom prst="ellipse">
+              <a:avLst/>
+            </a:prstGeom>
+            <a:solidFill>
+              <a:srgbClr val="0F172A"/>
+            </a:solidFill>
+            <a:ln w="25400">
+              <a:solidFill>
+                <a:srgbClr val="FFFFFF"/>
+              </a:solidFill>
+            </a:ln>
+            <a:effectLst/>
+          </p:spPr>
+          <p:style>
+            <a:lnRef idx="1">
+              <a:schemeClr val="accent1"/>
+            </a:lnRef>
+            <a:fillRef idx="3">
+              <a:schemeClr val="accent1"/>
+            </a:fillRef>
+            <a:effectRef idx="2">
+              <a:schemeClr val="accent1"/>
+            </a:effectRef>
+            <a:fontRef idx="minor">
+              <a:schemeClr val="lt1"/>
+            </a:fontRef>
+          </p:style>
+          <p:txBody>
+            <a:bodyPr rtlCol="0" anchor="ctr"/>
+            <a:lstStyle/>
+            <a:p>
+              <a:pPr algn="ctr"/>
+            </a:p>
+          </p:txBody>
+        </p:sp>
+        <p:sp>
+          <p:nvSpPr>
+            <p:cNvPr id="7" name="TextBox 6"/>
+            <p:cNvSpPr txBox="1"/>
+            <p:nvPr/>
+          </p:nvSpPr>
+          <p:spPr>
+            <a:xfrm>
+              <a:off x="822960" y="2697480"/>
+              <a:ext cx="1965960" cy="365760"/>
+            </a:xfrm>
+            <a:prstGeom prst="rect">
+              <a:avLst/>
+            </a:prstGeom>
+            <a:noFill/>
+          </p:spPr>
+          <p:txBody>
+            <a:bodyPr wrap="square" anchor="t">
+              <a:spAutoFit/>
+            </a:bodyPr>
+            <a:lstStyle/>
+            <a:p>
+              <a:pPr algn="ctr">
+                <a:lnSpc>
+                  <a:spcPct val="100000"/>
+                </a:lnSpc>
+              </a:pPr>
+              <a:r>
+                <a:rPr sz="1400" b="1">
+                  <a:solidFill>
+                    <a:srgbClr val="0F172A"/>
+                  </a:solidFill>
+                  <a:latin typeface="Segoe UI"/>
+                </a:rPr>
+                <a:t>{{ item.label }}</a:t>
+              </a:r>
+            </a:p>
+          </p:txBody>
+        </p:sp>
+        <p:sp>
+          <p:nvSpPr>
+            <p:cNvPr id="8" name="TextBox 7"/>
+            <p:cNvSpPr txBox="1"/>
+            <p:nvPr/>
+          </p:nvSpPr>
+          <p:spPr>
+            <a:xfrm>
+              <a:off x="822960" y="3127248"/>
+              <a:ext cx="1965960" cy="320040"/>
+            </a:xfrm>
+            <a:prstGeom prst="rect">
+              <a:avLst/>
+            </a:prstGeom>
+            <a:noFill/>
+          </p:spPr>
+          <p:txBody>
+            <a:bodyPr wrap="square" anchor="t">
+              <a:spAutoFit/>
+            </a:bodyPr>
+            <a:lstStyle/>
+            <a:p>
+              <a:pPr algn="ctr">
+                <a:lnSpc>
+                  <a:spcPct val="100000"/>
+                </a:lnSpc>
+              </a:pPr>
+              <a:r>
+                <a:rPr sz="1200" b="1">
+                  <a:solidFill>
+                    <a:srgbClr val="2563EB"/>
+                  </a:solidFill>
+                  <a:latin typeface="Segoe UI"/>
+                </a:rPr>
+                <a:t>{{ item.date }}</a:t>
+              </a:r>
+            </a:p>
+          </p:txBody>
+        </p:sp>
+        <p:sp>
+          <p:nvSpPr>
+            <p:cNvPr id="9" name="TextBox 8"/>
+            <p:cNvSpPr txBox="1"/>
+            <p:nvPr/>
+          </p:nvSpPr>
+          <p:spPr>
+            <a:xfrm>
+              <a:off x="822960" y="4114800"/>
+              <a:ext cx="1965960" cy="1371600"/>
+            </a:xfrm>
+            <a:prstGeom prst="rect">
+              <a:avLst/>
+            </a:prstGeom>
+            <a:noFill/>
+          </p:spPr>
+          <p:txBody>
+            <a:bodyPr wrap="square" anchor="t">
+              <a:spAutoFit/>
+            </a:bodyPr>
+            <a:lstStyle/>
+            <a:p>
+              <a:pPr algn="ctr">
+                <a:lnSpc>
+                  <a:spcPct val="100000"/>
+                </a:lnSpc>
+              </a:pPr>
+              <a:r>
+                <a:rPr sz="1150" b="0">
+                  <a:solidFill>
+                    <a:srgbClr val="54617A"/>
+                  </a:solidFill>
+                  <a:latin typeface="Segoe UI"/>
+                </a:rPr>
+                <a:t>{{ item.text }}</a:t>
+              </a:r>
+            </a:p>
+          </p:txBody>
+        </p:sp>
+      </p:grpSp>
+    </p:spTree>
+  </p:cSld>
+  <p:clrMapOvr>
+    <a:masterClrMapping/>
+  </p:clrMapOvr>
+</p:sld>
+</file>
+
+<file path=ppt/slides/slide9.xml><?xml version="1.0" encoding="utf-8"?>
+<p:sld xmlns:a="http://schemas.openxmlformats.org/drawingml/2006/main" xmlns:p="http://schemas.openxmlformats.org/presentationml/2006/main" xmlns:r="http://schemas.openxmlformats.org/officeDocument/2006/relationships">
+  <p:cSld>
+    <p:bg>
+      <p:bgPr>
+        <a:solidFill>
+          <a:srgbClr val="FFFFFF"/>
+        </a:solidFill>
+        <a:effectLst/>
+      </p:bgPr>
+    </p:bg>
+    <p:spTree>
+      <p:nvGrpSpPr>
+        <p:cNvPr id="1" name=""/>
+        <p:cNvGrpSpPr/>
+        <p:nvPr/>
+      </p:nvGrpSpPr>
+      <p:grpSpPr/>
+      <p:sp>
+        <p:nvSpPr>
+          <p:cNvPr id="2" name="Title 1"/>
+          <p:cNvSpPr>
+            <a:spLocks noGrp="1"/>
+          </p:cNvSpPr>
+          <p:nvPr>
+            <p:ph type="title"/>
+          </p:nvPr>
+        </p:nvSpPr>
+        <p:spPr>
+          <a:xfrm>
+            <a:off x="822960" y="1051560"/>
+            <a:ext cx="10545775" cy="1188720"/>
+          </a:xfrm>
+        </p:spPr>
+        <p:txBody>
+          <a:bodyPr wrap="square"/>
+          <a:lstStyle/>
+          <a:p>
+            <a:pPr algn="l">
+              <a:lnSpc>
+                <a:spcPct val="105000"/>
+              </a:lnSpc>
+            </a:pPr>
+            <a:r>
+              <a:rPr sz="3200" b="1">
+                <a:solidFill>
+                  <a:srgbClr val="0F172A"/>
+                </a:solidFill>
+                <a:latin typeface="Segoe UI"/>
+              </a:rPr>
+              <a:t>{{ heading }}</a:t>
+            </a:r>
+          </a:p>
+        </p:txBody>
+      </p:sp>
+      <p:sp>
+        <p:nvSpPr>
+          <p:cNvPr id="3" name="Rectangle 2"/>
+          <p:cNvSpPr/>
+          <p:nvPr/>
+        </p:nvSpPr>
+        <p:spPr>
+          <a:xfrm>
+            <a:off x="822960" y="822960"/>
+            <a:ext cx="822960" cy="128016"/>
+          </a:xfrm>
+          <a:prstGeom prst="rect">
+            <a:avLst/>
+          </a:prstGeom>
+          <a:solidFill>
+            <a:srgbClr val="2563EB"/>
+          </a:solidFill>
+          <a:ln>
+            <a:noFill/>
+          </a:ln>
+          <a:effectLst/>
+        </p:spPr>
+        <p:style>
+          <a:lnRef idx="1">
+            <a:schemeClr val="accent1"/>
+          </a:lnRef>
+          <a:fillRef idx="3">
+            <a:schemeClr val="accent1"/>
+          </a:fillRef>
+          <a:effectRef idx="2">
+            <a:schemeClr val="accent1"/>
+          </a:effectRef>
+          <a:fontRef idx="minor">
+            <a:schemeClr val="lt1"/>
+          </a:fontRef>
+        </p:style>
+        <p:txBody>
+          <a:bodyPr rtlCol="0" anchor="ctr"/>
+          <a:lstStyle/>
+          <a:p>
+            <a:pPr algn="ctr"/>
+          </a:p>
+        </p:txBody>
+      </p:sp>
+      <p:sp>
+        <p:nvSpPr>
+          <p:cNvPr id="4" name="CHART_SLOT"/>
+          <p:cNvSpPr/>
+          <p:nvPr/>
+        </p:nvSpPr>
+        <p:spPr>
+          <a:xfrm>
+            <a:off x="822960" y="2286000"/>
+            <a:ext cx="10545775" cy="3566160"/>
+          </a:xfrm>
+          <a:prstGeom prst="rect">
+            <a:avLst/>
+          </a:prstGeom>
+          <a:solidFill>
+            <a:srgbClr val="F1F5F9"/>
+          </a:solidFill>
+          <a:ln>
+            <a:solidFill>
+              <a:srgbClr val="E2E8F0"/>
+            </a:solidFill>
+          </a:ln>
+          <a:effectLst/>
+        </p:spPr>
+        <p:style>
+          <a:lnRef idx="1">
+            <a:schemeClr val="accent1"/>
+          </a:lnRef>
+          <a:fillRef idx="3">
+            <a:schemeClr val="accent1"/>
+          </a:fillRef>
+          <a:effectRef idx="2">
+            <a:schemeClr val="accent1"/>
+          </a:effectRef>
+          <a:fontRef idx="minor">
+            <a:schemeClr val="lt1"/>
+          </a:fontRef>
+        </p:style>
+        <p:txBody>
+          <a:bodyPr rtlCol="0" anchor="ctr"/>
+          <a:lstStyle/>
+          <a:p>
+            <a:pPr algn="ctr"/>
+            <a:r>
+              <a:rPr sz="1200">
+                <a:solidFill>
+                  <a:srgbClr val="54617A"/>
+                </a:solidFill>
+                <a:latin typeface="Segoe UI"/>
+              </a:rPr>
+              <a:t>Native chart renders here (fill.py builds it from the entry's data)</a:t>
+            </a:r>
+          </a:p>
+        </p:txBody>
+      </p:sp>
+      <p:sp>
+        <p:nvSpPr>
+          <p:cNvPr id="5" name="TextBox 4"/>
           <p:cNvSpPr txBox="1"/>
           <p:nvPr/>
         </p:nvSpPr>
         <p:spPr>
           <a:xfrm>
-            <a:off x="822960" y="1280160"/>
+            <a:off x="822960" y="5989320"/>
             <a:ext cx="10545775" cy="411480"/>
           </a:xfrm>
           <a:prstGeom prst="rect">
@@ -4459,57 +6320,13 @@
               </a:lnSpc>
             </a:pPr>
             <a:r>
-              <a:rPr sz="1500" b="1">
+              <a:rPr sz="1300" b="1">
                 <a:solidFill>
-                  <a:srgbClr val="0891B2"/>
+                  <a:srgbClr val="2563EB"/>
                 </a:solidFill>
                 <a:latin typeface="Segoe UI"/>
               </a:rPr>
-              <a:t>WHY US</a:t>
-            </a:r>
-          </a:p>
-        </p:txBody>
-      </p:sp>
-      <p:sp>
-        <p:nvSpPr>
-          <p:cNvPr id="5" name="TextBox 4"/>
-          <p:cNvSpPr txBox="1"/>
-          <p:nvPr/>
-        </p:nvSpPr>
-        <p:spPr>
-          <a:xfrm>
-            <a:off x="822960" y="3566160"/>
-            <a:ext cx="10545775" cy="2377440"/>
-          </a:xfrm>
-          <a:prstGeom prst="rect">
-            <a:avLst/>
-          </a:prstGeom>
-          <a:noFill/>
-        </p:spPr>
-        <p:txBody>
-          <a:bodyPr wrap="square">
-            <a:spAutoFit/>
-          </a:bodyPr>
-          <a:lstStyle/>
-          <a:p>
-            <a:pPr marL="228600" indent="-228600">
-              <a:lnSpc>
-                <a:spcPct val="120000"/>
-              </a:lnSpc>
-              <a:spcAft>
-                <a:spcPts val="1000"/>
-              </a:spcAft>
-              <a:buFont typeface="Arial" pitchFamily="34" charset="0"/>
-              <a:buChar char="•"/>
-            </a:pPr>
-            <a:r>
-              <a:rPr sz="1900">
-                <a:solidFill>
-                  <a:srgbClr val="F5F7FA"/>
-                </a:solidFill>
-                <a:latin typeface="Segoe UI"/>
-              </a:rPr>
-              <a:t>{{ value_points }}</a:t>
+              <a:t>{{ takeaway }}</a:t>
             </a:r>
           </a:p>
         </p:txBody>
